--- a/lectures/04/Потоки.pptx
+++ b/lectures/04/Потоки.pptx
@@ -266,7 +266,7 @@
           <a:p>
             <a:fld id="{EDD8CABC-4D06-4A5B-9773-EE99B82DA016}" type="datetimeFigureOut">
               <a:rPr lang="en-US" smtClean="0"/>
-              <a:t>9/26/2025</a:t>
+              <a:t>6/19/2026</a:t>
             </a:fld>
             <a:endParaRPr lang="en-US"/>
           </a:p>
@@ -663,7 +663,7 @@
           <a:p>
             <a:r>
               <a:rPr lang="ru-RU" dirty="0"/>
-              <a:t>Всё, что относится к ресурсам, — общее для всех нитей процесса: одна виртуальная память, одни глобальные переменные, одна таблица открытых файлов. Зато у каждой нити свой контекст исполнения: PC, регистры и </a:t>
+              <a:t>Всё, что относится к ресурсам, — общее для всех потоков процесса: одна виртуальная память, одни глобальные переменные, одна таблица открытых файлов. Зато у каждой потока свой контекст исполнения: PC, регистры и </a:t>
             </a:r>
             <a:r>
               <a:rPr lang="ru-RU" b="1" dirty="0"/>
@@ -1001,7 +1001,7 @@
           <a:p>
             <a:r>
               <a:rPr lang="ru-RU" dirty="0"/>
-              <a:t>Обычно процесс стартует с одной нити, которая порождает другие: </a:t>
+              <a:t>Обычно процесс стартует с одного потока, которая порождает другие: </a:t>
             </a:r>
             <a:r>
               <a:rPr lang="ru-RU" sz="1200" kern="1200" dirty="0" err="1">
@@ -1061,7 +1061,7 @@
             </a:r>
             <a:r>
               <a:rPr lang="ru-RU" dirty="0"/>
-              <a:t>: добровольно уступить процессор, если система не использует вытесняющую многозадачность на уровне нитей. Эти примитивы очень похожи на процессные (</a:t>
+              <a:t>: добровольно уступить процессор, если система не использует вытесняющую многозадачность на уровне потоков. Эти примитивы очень похожи на процессные (</a:t>
             </a:r>
             <a:r>
               <a:rPr lang="ru-RU" sz="1200" kern="1200" dirty="0" err="1">
@@ -1209,7 +1209,7 @@
             </a:r>
             <a:r>
               <a:rPr lang="ru-RU" b="1" dirty="0"/>
-              <a:t>только вызывавшая нить</a:t>
+              <a:t>только вызывавший поток</a:t>
             </a:r>
             <a:r>
               <a:rPr lang="ru-RU" dirty="0"/>
@@ -1228,7 +1228,7 @@
             </a:r>
             <a:r>
               <a:rPr lang="ru-RU" dirty="0"/>
-              <a:t>: зарегистрировать обработчики, остановить/возобновить подсистемы, пересоздать рабочие нити. Но в целом помните: отношение </a:t>
+              <a:t>: зарегистрировать обработчики, остановить/возобновить подсистемы, пересоздать рабочие потоки. Но в целом помните: отношение </a:t>
             </a:r>
             <a:r>
               <a:rPr lang="ru-RU" sz="1200" kern="1200" dirty="0" err="1">
@@ -3290,7 +3290,7 @@
             </a:r>
             <a:r>
               <a:rPr lang="ru-RU" b="1" dirty="0"/>
-              <a:t>на уровне нити</a:t>
+              <a:t>на уровне потока</a:t>
             </a:r>
             <a:r>
               <a:rPr lang="ru-RU" dirty="0"/>
@@ -5405,7 +5405,7 @@
           <a:p>
             <a:r>
               <a:rPr lang="ru-RU" dirty="0"/>
-              <a:t>Поток — это способ разделить выполнение программы на несколько параллельных «нитей» в рамках одного процесса.</a:t>
+              <a:t>Поток — это способ разделить выполнение программы на несколько параллельных «потоков» в рамках одного процесса.</a:t>
             </a:r>
           </a:p>
           <a:p>
@@ -8330,7 +8330,7 @@
             </a:r>
             <a:r>
               <a:rPr lang="ru-RU" dirty="0"/>
-              <a:t> — каждая нить получает свою независимую копию переменной, что устраняет гонки данных.</a:t>
+              <a:t> — каждый поток получает свою независимую копию переменной, что устраняет гонки данных.</a:t>
             </a:r>
           </a:p>
           <a:p>
@@ -9676,7 +9676,7 @@
           <a:p>
             <a:r>
               <a:rPr lang="ru-RU" dirty="0"/>
-              <a:t>Мы разделяем процесс на два аспекта: ресурсы и исполнение. Процесс держит память, файлы, сигналы, а поток — это «живая» нить выполнения с собственным PC, регистрами и стеком. Добавив несколько нитей в один процесс, мы получаем параллельные «микро-процессы», но с общими ресурсами. Это позволяет проще строить приложения, где несколько активностей должны тесно кооперироваться.</a:t>
+              <a:t>Мы разделяем процесс на два аспекта: ресурсы и исполнение. Процесс держит память, файлы, сигналы, а поток — это «живая» нить выполнения с собственным PC, регистрами и стеком. Добавив несколько потоков в один процесс, мы получаем параллельные «микро-процессы», но с общими ресурсами. Это позволяет проще строить приложения, где несколько активностей должны тесно кооперироваться.</a:t>
             </a:r>
             <a:endParaRPr lang="en-US" dirty="0"/>
           </a:p>
@@ -9865,7 +9865,7 @@
           <a:p>
             <a:fld id="{454C5D73-0869-4BC2-AC56-17788AF4573A}" type="datetimeFigureOut">
               <a:rPr lang="en-US" smtClean="0"/>
-              <a:t>9/26/2025</a:t>
+              <a:t>6/19/2026</a:t>
             </a:fld>
             <a:endParaRPr lang="en-US"/>
           </a:p>
@@ -10063,7 +10063,7 @@
           <a:p>
             <a:fld id="{454C5D73-0869-4BC2-AC56-17788AF4573A}" type="datetimeFigureOut">
               <a:rPr lang="en-US" smtClean="0"/>
-              <a:t>9/26/2025</a:t>
+              <a:t>6/19/2026</a:t>
             </a:fld>
             <a:endParaRPr lang="en-US"/>
           </a:p>
@@ -10271,7 +10271,7 @@
           <a:p>
             <a:fld id="{454C5D73-0869-4BC2-AC56-17788AF4573A}" type="datetimeFigureOut">
               <a:rPr lang="en-US" smtClean="0"/>
-              <a:t>9/26/2025</a:t>
+              <a:t>6/19/2026</a:t>
             </a:fld>
             <a:endParaRPr lang="en-US"/>
           </a:p>
@@ -10469,7 +10469,7 @@
           <a:p>
             <a:fld id="{454C5D73-0869-4BC2-AC56-17788AF4573A}" type="datetimeFigureOut">
               <a:rPr lang="en-US" smtClean="0"/>
-              <a:t>9/26/2025</a:t>
+              <a:t>6/19/2026</a:t>
             </a:fld>
             <a:endParaRPr lang="en-US"/>
           </a:p>
@@ -10744,7 +10744,7 @@
           <a:p>
             <a:fld id="{454C5D73-0869-4BC2-AC56-17788AF4573A}" type="datetimeFigureOut">
               <a:rPr lang="en-US" smtClean="0"/>
-              <a:t>9/26/2025</a:t>
+              <a:t>6/19/2026</a:t>
             </a:fld>
             <a:endParaRPr lang="en-US"/>
           </a:p>
@@ -11009,7 +11009,7 @@
           <a:p>
             <a:fld id="{454C5D73-0869-4BC2-AC56-17788AF4573A}" type="datetimeFigureOut">
               <a:rPr lang="en-US" smtClean="0"/>
-              <a:t>9/26/2025</a:t>
+              <a:t>6/19/2026</a:t>
             </a:fld>
             <a:endParaRPr lang="en-US"/>
           </a:p>
@@ -11421,7 +11421,7 @@
           <a:p>
             <a:fld id="{454C5D73-0869-4BC2-AC56-17788AF4573A}" type="datetimeFigureOut">
               <a:rPr lang="en-US" smtClean="0"/>
-              <a:t>9/26/2025</a:t>
+              <a:t>6/19/2026</a:t>
             </a:fld>
             <a:endParaRPr lang="en-US"/>
           </a:p>
@@ -11562,7 +11562,7 @@
           <a:p>
             <a:fld id="{454C5D73-0869-4BC2-AC56-17788AF4573A}" type="datetimeFigureOut">
               <a:rPr lang="en-US" smtClean="0"/>
-              <a:t>9/26/2025</a:t>
+              <a:t>6/19/2026</a:t>
             </a:fld>
             <a:endParaRPr lang="en-US"/>
           </a:p>
@@ -11675,7 +11675,7 @@
           <a:p>
             <a:fld id="{454C5D73-0869-4BC2-AC56-17788AF4573A}" type="datetimeFigureOut">
               <a:rPr lang="en-US" smtClean="0"/>
-              <a:t>9/26/2025</a:t>
+              <a:t>6/19/2026</a:t>
             </a:fld>
             <a:endParaRPr lang="en-US"/>
           </a:p>
@@ -11986,7 +11986,7 @@
           <a:p>
             <a:fld id="{454C5D73-0869-4BC2-AC56-17788AF4573A}" type="datetimeFigureOut">
               <a:rPr lang="en-US" smtClean="0"/>
-              <a:t>9/26/2025</a:t>
+              <a:t>6/19/2026</a:t>
             </a:fld>
             <a:endParaRPr lang="en-US"/>
           </a:p>
@@ -12274,7 +12274,7 @@
           <a:p>
             <a:fld id="{454C5D73-0869-4BC2-AC56-17788AF4573A}" type="datetimeFigureOut">
               <a:rPr lang="en-US" smtClean="0"/>
-              <a:t>9/26/2025</a:t>
+              <a:t>6/19/2026</a:t>
             </a:fld>
             <a:endParaRPr lang="en-US"/>
           </a:p>
@@ -12515,7 +12515,7 @@
           <a:p>
             <a:fld id="{454C5D73-0869-4BC2-AC56-17788AF4573A}" type="datetimeFigureOut">
               <a:rPr lang="en-US" smtClean="0"/>
-              <a:t>9/26/2025</a:t>
+              <a:t>6/19/2026</a:t>
             </a:fld>
             <a:endParaRPr lang="en-US"/>
           </a:p>
@@ -13946,7 +13946,7 @@
             </a:r>
             <a:r>
               <a:rPr lang="ru-RU" dirty="0"/>
-              <a:t>запуск новой нити (в том же адресном пространстве)</a:t>
+              <a:t>запуск нового потока (в том же адресном пространстве)</a:t>
             </a:r>
           </a:p>
           <a:p>
@@ -13960,7 +13960,7 @@
             </a:r>
             <a:r>
               <a:rPr lang="ru-RU" dirty="0"/>
-              <a:t>завершение нити</a:t>
+              <a:t>завершение потока</a:t>
             </a:r>
           </a:p>
           <a:p>
@@ -13982,7 +13982,7 @@
             </a:r>
             <a:r>
               <a:rPr lang="ru-RU" dirty="0"/>
-              <a:t>ожидание завершения конкретной нити</a:t>
+              <a:t>ожидание завершения конкретного потока</a:t>
             </a:r>
           </a:p>
           <a:p>
@@ -14114,7 +14114,7 @@
             </a:r>
             <a:r>
               <a:rPr lang="ru-RU" b="1" dirty="0"/>
-              <a:t>в ребёнке одна нить</a:t>
+              <a:t>в ребёнке один поток</a:t>
             </a:r>
             <a:endParaRPr lang="ru-RU" dirty="0"/>
           </a:p>
